--- a/第6回_Transformer_Block/excel_transformer_block_slides.pptx
+++ b/第6回_Transformer_Block/excel_transformer_block_slides.pptx
@@ -3223,6 +3223,7 @@
           </a:bodyPr>
           <a:lstStyle/>
           <a:p>
+            <a:pPr algn="l"/>
             <a:r>
               <a:rPr sz="2500" b="1">
                 <a:solidFill>
@@ -3230,7 +3231,7 @@
                 </a:solidFill>
                 <a:latin typeface="Yu Gothic"/>
               </a:rPr>
-              <a:t>Excelで体験する言語モデルのしくみ</a:t>
+              <a:t>Excelで体験する 言語モデルのしくみ</a:t>
             </a:r>
           </a:p>
         </p:txBody>
